--- a/aosis-deck-builder/assets/AOSIS_template.pptx
+++ b/aosis-deck-builder/assets/AOSIS_template.pptx
@@ -5934,6 +5934,75 @@
 </file>
 
 <file path=ppt/slides/slide17.xml><?xml version="1.0" encoding="utf-8"?>
+<p:sld xmlns:a="http://schemas.openxmlformats.org/drawingml/2006/main" xmlns:p="http://schemas.openxmlformats.org/presentationml/2006/main" xmlns:r="http://schemas.openxmlformats.org/officeDocument/2006/relationships">
+  <p:cSld name="data_table">
+    <p:spTree>
+      <p:nvGrpSpPr>
+        <p:cNvPr id="1" name=""/>
+        <p:cNvGrpSpPr/>
+        <p:nvPr/>
+      </p:nvGrpSpPr>
+      <p:grpSpPr/>
+      <p:sp>
+        <p:nvSpPr>
+          <p:cNvPr id="2" name="{{TITLE}}"/>
+          <p:cNvSpPr>
+            <a:spLocks noGrp="1"/>
+          </p:cNvSpPr>
+          <p:nvPr>
+            <p:ph type="title"/>
+          </p:nvPr>
+        </p:nvSpPr>
+        <p:spPr/>
+        <p:txBody>
+          <a:bodyPr/>
+          <a:lstStyle/>
+          <a:p/>
+        </p:txBody>
+      </p:sp>
+      <p:sp>
+        <p:nvSpPr>
+          <p:cNvPr id="3" name="{{SOURCE}}"/>
+          <p:cNvSpPr txBox="1"/>
+          <p:nvPr/>
+        </p:nvSpPr>
+        <p:spPr>
+          <a:xfrm>
+            <a:off x="365760" y="4663440"/>
+            <a:ext cx="5486400" cy="274320"/>
+          </a:xfrm>
+          <a:prstGeom prst="rect">
+            <a:avLst/>
+          </a:prstGeom>
+          <a:noFill/>
+        </p:spPr>
+        <p:txBody>
+          <a:bodyPr wrap="none">
+            <a:spAutoFit/>
+          </a:bodyPr>
+          <a:lstStyle/>
+          <a:p>
+            <a:r>
+              <a:rPr sz="800" i="1">
+                <a:solidFill>
+                  <a:srgbClr val="4A4D6B"/>
+                </a:solidFill>
+                <a:latin typeface="Arial"/>
+              </a:rPr>
+              <a:t>Source : ...</a:t>
+            </a:r>
+          </a:p>
+        </p:txBody>
+      </p:sp>
+    </p:spTree>
+  </p:cSld>
+  <p:clrMapOvr>
+    <a:masterClrMapping/>
+  </p:clrMapOvr>
+</p:sld>
+</file>
+
+<file path=ppt/slides/slide18.xml><?xml version="1.0" encoding="utf-8"?>
 <p:sld xmlns:a="http://schemas.openxmlformats.org/drawingml/2006/main" xmlns:r="http://schemas.openxmlformats.org/officeDocument/2006/relationships" xmlns:p="http://schemas.openxmlformats.org/presentationml/2006/main">
   <p:cSld name="final_branding">
     <p:spTree>
@@ -5956,75 +6025,6 @@
         <p14:creationId xmlns:p14="http://schemas.microsoft.com/office/powerpoint/2010/main" val="2499568016"/>
       </p:ext>
     </p:extLst>
-  </p:cSld>
-  <p:clrMapOvr>
-    <a:masterClrMapping/>
-  </p:clrMapOvr>
-</p:sld>
-</file>
-
-<file path=ppt/slides/slide18.xml><?xml version="1.0" encoding="utf-8"?>
-<p:sld xmlns:a="http://schemas.openxmlformats.org/drawingml/2006/main" xmlns:p="http://schemas.openxmlformats.org/presentationml/2006/main" xmlns:r="http://schemas.openxmlformats.org/officeDocument/2006/relationships">
-  <p:cSld name="data_table">
-    <p:spTree>
-      <p:nvGrpSpPr>
-        <p:cNvPr id="1" name=""/>
-        <p:cNvGrpSpPr/>
-        <p:nvPr/>
-      </p:nvGrpSpPr>
-      <p:grpSpPr/>
-      <p:sp>
-        <p:nvSpPr>
-          <p:cNvPr id="2" name="{{TITLE}}"/>
-          <p:cNvSpPr>
-            <a:spLocks noGrp="1"/>
-          </p:cNvSpPr>
-          <p:nvPr>
-            <p:ph type="title"/>
-          </p:nvPr>
-        </p:nvSpPr>
-        <p:spPr/>
-        <p:txBody>
-          <a:bodyPr/>
-          <a:lstStyle/>
-          <a:p/>
-        </p:txBody>
-      </p:sp>
-      <p:sp>
-        <p:nvSpPr>
-          <p:cNvPr id="3" name="{{SOURCE}}"/>
-          <p:cNvSpPr txBox="1"/>
-          <p:nvPr/>
-        </p:nvSpPr>
-        <p:spPr>
-          <a:xfrm>
-            <a:off x="365760" y="4663440"/>
-            <a:ext cx="5486400" cy="274320"/>
-          </a:xfrm>
-          <a:prstGeom prst="rect">
-            <a:avLst/>
-          </a:prstGeom>
-          <a:noFill/>
-        </p:spPr>
-        <p:txBody>
-          <a:bodyPr wrap="none">
-            <a:spAutoFit/>
-          </a:bodyPr>
-          <a:lstStyle/>
-          <a:p>
-            <a:r>
-              <a:rPr sz="800" i="1">
-                <a:solidFill>
-                  <a:srgbClr val="4A4D6B"/>
-                </a:solidFill>
-                <a:latin typeface="Arial"/>
-              </a:rPr>
-              <a:t>Source : ...</a:t>
-            </a:r>
-          </a:p>
-        </p:txBody>
-      </p:sp>
-    </p:spTree>
   </p:cSld>
   <p:clrMapOvr>
     <a:masterClrMapping/>
@@ -7019,8 +7019,8 @@
           </p:nvSpPr>
           <p:spPr>
             <a:xfrm>
-              <a:off x="488482" y="1856048"/>
-              <a:ext cx="1501541" cy="276999"/>
+              <a:off x="365760" y="2059895"/>
+              <a:ext cx="2651760" cy="316992"/>
             </a:xfrm>
             <a:prstGeom prst="rect">
               <a:avLst/>
@@ -7028,20 +7028,10 @@
             <a:noFill/>
           </p:spPr>
           <p:txBody>
-            <a:bodyPr wrap="square" lIns="0" tIns="0" rIns="0" bIns="0" anchor="t">
-              <a:spAutoFit/>
-            </a:bodyPr>
+            <a:bodyPr wrap="square" lIns="0" tIns="0" rIns="0" bIns="0" anchor="ctr"/>
             <a:lstStyle/>
             <a:p>
-              <a:r>
-                <a:rPr sz="1800" b="1" i="0" dirty="0">
-                  <a:solidFill>
-                    <a:srgbClr val="F26622"/>
-                  </a:solidFill>
-                  <a:latin typeface="Arial"/>
-                </a:rPr>
-                <a:t>KPI label</a:t>
-              </a:r>
+              <a:pPr algn="ctr"/>
             </a:p>
           </p:txBody>
         </p:sp>
@@ -7053,8 +7043,8 @@
           </p:nvSpPr>
           <p:spPr>
             <a:xfrm>
-              <a:off x="2112744" y="1778360"/>
-              <a:ext cx="914401" cy="430887"/>
+              <a:off x="365760" y="1584407"/>
+              <a:ext cx="2651760" cy="435864"/>
             </a:xfrm>
             <a:prstGeom prst="rect">
               <a:avLst/>
@@ -7062,12 +7052,10 @@
             <a:noFill/>
           </p:spPr>
           <p:txBody>
-            <a:bodyPr wrap="square" lIns="0" tIns="0" rIns="0" bIns="0" anchor="t">
-              <a:spAutoFit/>
-            </a:bodyPr>
+            <a:bodyPr wrap="square" lIns="0" tIns="0" rIns="0" bIns="0" anchor="ctr"/>
             <a:lstStyle/>
             <a:p>
-              <a:pPr algn="l"/>
+              <a:pPr algn="ctr"/>
               <a:r>
                 <a:rPr sz="2800" b="1" i="0" dirty="0">
                   <a:solidFill>
